--- a/hack_composition.pptx
+++ b/hack_composition.pptx
@@ -7,6 +7,7 @@
   <p:sldIdLst>
     <p:sldId id="260" r:id="rId2"/>
     <p:sldId id="261" r:id="rId3"/>
+    <p:sldId id="262" r:id="rId4"/>
   </p:sldIdLst>
   <p:sldSz cx="12192000" cy="6858000"/>
   <p:notesSz cx="6858000" cy="9144000"/>
@@ -4187,6 +4188,828 @@
 </file>
 
 <file path=ppt/slides/slide2.xml><?xml version="1.0" encoding="utf-8"?>
+<p:sld xmlns:a="http://schemas.openxmlformats.org/drawingml/2006/main" xmlns:r="http://schemas.openxmlformats.org/officeDocument/2006/relationships" xmlns:p="http://schemas.openxmlformats.org/presentationml/2006/main" show="0">
+  <p:cSld>
+    <p:spTree>
+      <p:nvGrpSpPr>
+        <p:cNvPr id="1" name=""/>
+        <p:cNvGrpSpPr/>
+        <p:nvPr/>
+      </p:nvGrpSpPr>
+      <p:grpSpPr>
+        <a:xfrm>
+          <a:off x="0" y="0"/>
+          <a:ext cx="0" cy="0"/>
+          <a:chOff x="0" y="0"/>
+          <a:chExt cx="0" cy="0"/>
+        </a:xfrm>
+      </p:grpSpPr>
+      <p:pic>
+        <p:nvPicPr>
+          <p:cNvPr id="8" name="図 7" descr="電子機器の部品&#10;&#10;中程度の精度で自動的に生成された説明">
+            <a:extLst>
+              <a:ext uri="{FF2B5EF4-FFF2-40B4-BE49-F238E27FC236}">
+                <a16:creationId xmlns:a16="http://schemas.microsoft.com/office/drawing/2014/main" id="{2CFDCC55-0944-72D6-114D-2898C4ADD16E}"/>
+              </a:ext>
+            </a:extLst>
+          </p:cNvPr>
+          <p:cNvPicPr>
+            <a:picLocks noChangeAspect="1"/>
+          </p:cNvPicPr>
+          <p:nvPr/>
+        </p:nvPicPr>
+        <p:blipFill>
+          <a:blip r:embed="rId2"/>
+          <a:stretch>
+            <a:fillRect/>
+          </a:stretch>
+        </p:blipFill>
+        <p:spPr>
+          <a:xfrm>
+            <a:off x="2262129" y="288102"/>
+            <a:ext cx="2803409" cy="2102557"/>
+          </a:xfrm>
+          <a:prstGeom prst="rect">
+            <a:avLst/>
+          </a:prstGeom>
+        </p:spPr>
+      </p:pic>
+      <p:pic>
+        <p:nvPicPr>
+          <p:cNvPr id="12" name="図 11">
+            <a:extLst>
+              <a:ext uri="{FF2B5EF4-FFF2-40B4-BE49-F238E27FC236}">
+                <a16:creationId xmlns:a16="http://schemas.microsoft.com/office/drawing/2014/main" id="{9063B56F-7ADC-7C51-CE76-1D0C22E99305}"/>
+              </a:ext>
+            </a:extLst>
+          </p:cNvPr>
+          <p:cNvPicPr>
+            <a:picLocks noChangeAspect="1"/>
+          </p:cNvPicPr>
+          <p:nvPr/>
+        </p:nvPicPr>
+        <p:blipFill>
+          <a:blip r:embed="rId3"/>
+          <a:stretch>
+            <a:fillRect/>
+          </a:stretch>
+        </p:blipFill>
+        <p:spPr>
+          <a:xfrm>
+            <a:off x="966070" y="3707282"/>
+            <a:ext cx="878019" cy="1608253"/>
+          </a:xfrm>
+          <a:prstGeom prst="rect">
+            <a:avLst/>
+          </a:prstGeom>
+        </p:spPr>
+      </p:pic>
+      <p:pic>
+        <p:nvPicPr>
+          <p:cNvPr id="14" name="図 13" descr="電子機器の部品&#10;&#10;中程度の精度で自動的に生成された説明">
+            <a:extLst>
+              <a:ext uri="{FF2B5EF4-FFF2-40B4-BE49-F238E27FC236}">
+                <a16:creationId xmlns:a16="http://schemas.microsoft.com/office/drawing/2014/main" id="{E79CA363-1B9C-77F0-514D-7333CF9211CA}"/>
+              </a:ext>
+            </a:extLst>
+          </p:cNvPr>
+          <p:cNvPicPr>
+            <a:picLocks noChangeAspect="1"/>
+          </p:cNvPicPr>
+          <p:nvPr/>
+        </p:nvPicPr>
+        <p:blipFill>
+          <a:blip r:embed="rId2"/>
+          <a:stretch>
+            <a:fillRect/>
+          </a:stretch>
+        </p:blipFill>
+        <p:spPr>
+          <a:xfrm>
+            <a:off x="7126463" y="288102"/>
+            <a:ext cx="2803409" cy="2102557"/>
+          </a:xfrm>
+          <a:prstGeom prst="rect">
+            <a:avLst/>
+          </a:prstGeom>
+        </p:spPr>
+      </p:pic>
+      <p:pic>
+        <p:nvPicPr>
+          <p:cNvPr id="15" name="図 14">
+            <a:extLst>
+              <a:ext uri="{FF2B5EF4-FFF2-40B4-BE49-F238E27FC236}">
+                <a16:creationId xmlns:a16="http://schemas.microsoft.com/office/drawing/2014/main" id="{58D0ACCA-ACD9-3546-4994-487C1C0D8682}"/>
+              </a:ext>
+            </a:extLst>
+          </p:cNvPr>
+          <p:cNvPicPr>
+            <a:picLocks noChangeAspect="1"/>
+          </p:cNvPicPr>
+          <p:nvPr/>
+        </p:nvPicPr>
+        <p:blipFill>
+          <a:blip r:embed="rId3"/>
+          <a:stretch>
+            <a:fillRect/>
+          </a:stretch>
+        </p:blipFill>
+        <p:spPr>
+          <a:xfrm>
+            <a:off x="1844089" y="3707282"/>
+            <a:ext cx="878019" cy="1608253"/>
+          </a:xfrm>
+          <a:prstGeom prst="rect">
+            <a:avLst/>
+          </a:prstGeom>
+        </p:spPr>
+      </p:pic>
+      <p:pic>
+        <p:nvPicPr>
+          <p:cNvPr id="16" name="図 15">
+            <a:extLst>
+              <a:ext uri="{FF2B5EF4-FFF2-40B4-BE49-F238E27FC236}">
+                <a16:creationId xmlns:a16="http://schemas.microsoft.com/office/drawing/2014/main" id="{DB80488C-E1AE-935E-D486-F1943751007C}"/>
+              </a:ext>
+            </a:extLst>
+          </p:cNvPr>
+          <p:cNvPicPr>
+            <a:picLocks noChangeAspect="1"/>
+          </p:cNvPicPr>
+          <p:nvPr/>
+        </p:nvPicPr>
+        <p:blipFill>
+          <a:blip r:embed="rId3"/>
+          <a:stretch>
+            <a:fillRect/>
+          </a:stretch>
+        </p:blipFill>
+        <p:spPr>
+          <a:xfrm>
+            <a:off x="2722108" y="3707282"/>
+            <a:ext cx="878019" cy="1608253"/>
+          </a:xfrm>
+          <a:prstGeom prst="rect">
+            <a:avLst/>
+          </a:prstGeom>
+        </p:spPr>
+      </p:pic>
+      <p:pic>
+        <p:nvPicPr>
+          <p:cNvPr id="17" name="図 16">
+            <a:extLst>
+              <a:ext uri="{FF2B5EF4-FFF2-40B4-BE49-F238E27FC236}">
+                <a16:creationId xmlns:a16="http://schemas.microsoft.com/office/drawing/2014/main" id="{EF330DE2-CC24-E634-48DC-FE78A1BA2335}"/>
+              </a:ext>
+            </a:extLst>
+          </p:cNvPr>
+          <p:cNvPicPr>
+            <a:picLocks noChangeAspect="1"/>
+          </p:cNvPicPr>
+          <p:nvPr/>
+        </p:nvPicPr>
+        <p:blipFill>
+          <a:blip r:embed="rId3"/>
+          <a:stretch>
+            <a:fillRect/>
+          </a:stretch>
+        </p:blipFill>
+        <p:spPr>
+          <a:xfrm>
+            <a:off x="3498201" y="3707281"/>
+            <a:ext cx="878019" cy="1608253"/>
+          </a:xfrm>
+          <a:prstGeom prst="rect">
+            <a:avLst/>
+          </a:prstGeom>
+        </p:spPr>
+      </p:pic>
+      <p:pic>
+        <p:nvPicPr>
+          <p:cNvPr id="18" name="図 17">
+            <a:extLst>
+              <a:ext uri="{FF2B5EF4-FFF2-40B4-BE49-F238E27FC236}">
+                <a16:creationId xmlns:a16="http://schemas.microsoft.com/office/drawing/2014/main" id="{663085E1-F236-B9A3-B976-1C98CCCF792D}"/>
+              </a:ext>
+            </a:extLst>
+          </p:cNvPr>
+          <p:cNvPicPr>
+            <a:picLocks noChangeAspect="1"/>
+          </p:cNvPicPr>
+          <p:nvPr/>
+        </p:nvPicPr>
+        <p:blipFill>
+          <a:blip r:embed="rId3"/>
+          <a:stretch>
+            <a:fillRect/>
+          </a:stretch>
+        </p:blipFill>
+        <p:spPr>
+          <a:xfrm>
+            <a:off x="4379929" y="3707281"/>
+            <a:ext cx="878019" cy="1608253"/>
+          </a:xfrm>
+          <a:prstGeom prst="rect">
+            <a:avLst/>
+          </a:prstGeom>
+        </p:spPr>
+      </p:pic>
+      <p:sp>
+        <p:nvSpPr>
+          <p:cNvPr id="19" name="テキスト ボックス 18">
+            <a:extLst>
+              <a:ext uri="{FF2B5EF4-FFF2-40B4-BE49-F238E27FC236}">
+                <a16:creationId xmlns:a16="http://schemas.microsoft.com/office/drawing/2014/main" id="{8D31FB83-B025-2989-A41E-0D4EEC501D3F}"/>
+              </a:ext>
+            </a:extLst>
+          </p:cNvPr>
+          <p:cNvSpPr txBox="1"/>
+          <p:nvPr/>
+        </p:nvSpPr>
+        <p:spPr>
+          <a:xfrm>
+            <a:off x="3111797" y="5596568"/>
+            <a:ext cx="636713" cy="369332"/>
+          </a:xfrm>
+          <a:prstGeom prst="rect">
+            <a:avLst/>
+          </a:prstGeom>
+          <a:noFill/>
+        </p:spPr>
+        <p:txBody>
+          <a:bodyPr wrap="none" rtlCol="0">
+            <a:spAutoFit/>
+          </a:bodyPr>
+          <a:lstStyle/>
+          <a:p>
+            <a:r>
+              <a:rPr kumimoji="1" lang="en-US" altLang="ja-JP" dirty="0"/>
+              <a:t>LED</a:t>
+            </a:r>
+            <a:endParaRPr kumimoji="1" lang="ja-JP" altLang="en-US"/>
+          </a:p>
+        </p:txBody>
+      </p:sp>
+      <p:sp>
+        <p:nvSpPr>
+          <p:cNvPr id="28" name="テキスト ボックス 27">
+            <a:extLst>
+              <a:ext uri="{FF2B5EF4-FFF2-40B4-BE49-F238E27FC236}">
+                <a16:creationId xmlns:a16="http://schemas.microsoft.com/office/drawing/2014/main" id="{F3681FCC-E1AB-A1A8-C494-E41D655A4C53}"/>
+              </a:ext>
+            </a:extLst>
+          </p:cNvPr>
+          <p:cNvSpPr txBox="1"/>
+          <p:nvPr/>
+        </p:nvSpPr>
+        <p:spPr>
+          <a:xfrm>
+            <a:off x="8300733" y="5596568"/>
+            <a:ext cx="1338828" cy="369332"/>
+          </a:xfrm>
+          <a:prstGeom prst="rect">
+            <a:avLst/>
+          </a:prstGeom>
+          <a:noFill/>
+        </p:spPr>
+        <p:txBody>
+          <a:bodyPr wrap="none" rtlCol="0">
+            <a:spAutoFit/>
+          </a:bodyPr>
+          <a:lstStyle/>
+          <a:p>
+            <a:r>
+              <a:rPr kumimoji="1" lang="ja-JP" altLang="en-US"/>
+              <a:t>照度センサ</a:t>
+            </a:r>
+          </a:p>
+        </p:txBody>
+      </p:sp>
+      <p:cxnSp>
+        <p:nvCxnSpPr>
+          <p:cNvPr id="30" name="直線矢印コネクタ 29">
+            <a:extLst>
+              <a:ext uri="{FF2B5EF4-FFF2-40B4-BE49-F238E27FC236}">
+                <a16:creationId xmlns:a16="http://schemas.microsoft.com/office/drawing/2014/main" id="{24C265FA-A6E9-3470-B7A4-A4CA6010DA69}"/>
+              </a:ext>
+            </a:extLst>
+          </p:cNvPr>
+          <p:cNvCxnSpPr>
+            <a:cxnSpLocks/>
+          </p:cNvCxnSpPr>
+          <p:nvPr/>
+        </p:nvCxnSpPr>
+        <p:spPr>
+          <a:xfrm>
+            <a:off x="3558448" y="2390659"/>
+            <a:ext cx="0" cy="1156772"/>
+          </a:xfrm>
+          <a:prstGeom prst="straightConnector1">
+            <a:avLst/>
+          </a:prstGeom>
+          <a:ln w="50800">
+            <a:solidFill>
+              <a:schemeClr val="tx2">
+                <a:lumMod val="75000"/>
+                <a:lumOff val="25000"/>
+              </a:schemeClr>
+            </a:solidFill>
+            <a:tailEnd type="triangle"/>
+          </a:ln>
+        </p:spPr>
+        <p:style>
+          <a:lnRef idx="2">
+            <a:schemeClr val="accent1"/>
+          </a:lnRef>
+          <a:fillRef idx="0">
+            <a:schemeClr val="accent1"/>
+          </a:fillRef>
+          <a:effectRef idx="1">
+            <a:schemeClr val="accent1"/>
+          </a:effectRef>
+          <a:fontRef idx="minor">
+            <a:schemeClr val="tx1"/>
+          </a:fontRef>
+        </p:style>
+      </p:cxnSp>
+      <p:sp>
+        <p:nvSpPr>
+          <p:cNvPr id="34" name="テキスト ボックス 33">
+            <a:extLst>
+              <a:ext uri="{FF2B5EF4-FFF2-40B4-BE49-F238E27FC236}">
+                <a16:creationId xmlns:a16="http://schemas.microsoft.com/office/drawing/2014/main" id="{074DB4C8-337D-C1D9-6948-B7CD1B4D354F}"/>
+              </a:ext>
+            </a:extLst>
+          </p:cNvPr>
+          <p:cNvSpPr txBox="1"/>
+          <p:nvPr/>
+        </p:nvSpPr>
+        <p:spPr>
+          <a:xfrm>
+            <a:off x="1211855" y="638978"/>
+            <a:ext cx="1933543" cy="369332"/>
+          </a:xfrm>
+          <a:prstGeom prst="rect">
+            <a:avLst/>
+          </a:prstGeom>
+          <a:noFill/>
+        </p:spPr>
+        <p:txBody>
+          <a:bodyPr wrap="none" rtlCol="0">
+            <a:spAutoFit/>
+          </a:bodyPr>
+          <a:lstStyle/>
+          <a:p>
+            <a:r>
+              <a:rPr lang="en-US" altLang="ja-JP" dirty="0"/>
+              <a:t>Arduino</a:t>
+            </a:r>
+            <a:r>
+              <a:rPr lang="ja-JP" altLang="en-US"/>
+              <a:t>（送信）</a:t>
+            </a:r>
+            <a:endParaRPr kumimoji="1" lang="ja-JP" altLang="en-US"/>
+          </a:p>
+        </p:txBody>
+      </p:sp>
+      <p:sp>
+        <p:nvSpPr>
+          <p:cNvPr id="35" name="テキスト ボックス 34">
+            <a:extLst>
+              <a:ext uri="{FF2B5EF4-FFF2-40B4-BE49-F238E27FC236}">
+                <a16:creationId xmlns:a16="http://schemas.microsoft.com/office/drawing/2014/main" id="{3FA7B19C-5BED-C6AC-71DC-2AB98AA0C875}"/>
+              </a:ext>
+            </a:extLst>
+          </p:cNvPr>
+          <p:cNvSpPr txBox="1"/>
+          <p:nvPr/>
+        </p:nvSpPr>
+        <p:spPr>
+          <a:xfrm>
+            <a:off x="9594043" y="522768"/>
+            <a:ext cx="1933543" cy="369332"/>
+          </a:xfrm>
+          <a:prstGeom prst="rect">
+            <a:avLst/>
+          </a:prstGeom>
+          <a:noFill/>
+        </p:spPr>
+        <p:txBody>
+          <a:bodyPr wrap="none" rtlCol="0">
+            <a:spAutoFit/>
+          </a:bodyPr>
+          <a:lstStyle/>
+          <a:p>
+            <a:r>
+              <a:rPr lang="en-US" altLang="ja-JP" dirty="0"/>
+              <a:t>Arduino</a:t>
+            </a:r>
+            <a:r>
+              <a:rPr lang="ja-JP" altLang="en-US"/>
+              <a:t>（受信）</a:t>
+            </a:r>
+            <a:endParaRPr kumimoji="1" lang="ja-JP" altLang="en-US"/>
+          </a:p>
+        </p:txBody>
+      </p:sp>
+      <p:cxnSp>
+        <p:nvCxnSpPr>
+          <p:cNvPr id="37" name="直線矢印コネクタ 36">
+            <a:extLst>
+              <a:ext uri="{FF2B5EF4-FFF2-40B4-BE49-F238E27FC236}">
+                <a16:creationId xmlns:a16="http://schemas.microsoft.com/office/drawing/2014/main" id="{EA20C39F-A5D9-EB29-7C2C-5021271B5B32}"/>
+              </a:ext>
+            </a:extLst>
+          </p:cNvPr>
+          <p:cNvCxnSpPr>
+            <a:cxnSpLocks/>
+          </p:cNvCxnSpPr>
+          <p:nvPr/>
+        </p:nvCxnSpPr>
+        <p:spPr>
+          <a:xfrm>
+            <a:off x="5381525" y="4423271"/>
+            <a:ext cx="1184213" cy="0"/>
+          </a:xfrm>
+          <a:prstGeom prst="straightConnector1">
+            <a:avLst/>
+          </a:prstGeom>
+          <a:ln w="50800">
+            <a:solidFill>
+              <a:schemeClr val="tx2">
+                <a:lumMod val="75000"/>
+                <a:lumOff val="25000"/>
+              </a:schemeClr>
+            </a:solidFill>
+            <a:tailEnd type="triangle"/>
+          </a:ln>
+        </p:spPr>
+        <p:style>
+          <a:lnRef idx="2">
+            <a:schemeClr val="accent1"/>
+          </a:lnRef>
+          <a:fillRef idx="0">
+            <a:schemeClr val="accent1"/>
+          </a:fillRef>
+          <a:effectRef idx="1">
+            <a:schemeClr val="accent1"/>
+          </a:effectRef>
+          <a:fontRef idx="minor">
+            <a:schemeClr val="tx1"/>
+          </a:fontRef>
+        </p:style>
+      </p:cxnSp>
+      <p:cxnSp>
+        <p:nvCxnSpPr>
+          <p:cNvPr id="38" name="直線矢印コネクタ 37">
+            <a:extLst>
+              <a:ext uri="{FF2B5EF4-FFF2-40B4-BE49-F238E27FC236}">
+                <a16:creationId xmlns:a16="http://schemas.microsoft.com/office/drawing/2014/main" id="{55B969F8-A9FD-5D7F-004B-76EFD028B9CE}"/>
+              </a:ext>
+            </a:extLst>
+          </p:cNvPr>
+          <p:cNvCxnSpPr>
+            <a:cxnSpLocks/>
+          </p:cNvCxnSpPr>
+          <p:nvPr/>
+        </p:nvCxnSpPr>
+        <p:spPr>
+          <a:xfrm rot="10800000">
+            <a:off x="7711807" y="2423710"/>
+            <a:ext cx="0" cy="1156772"/>
+          </a:xfrm>
+          <a:prstGeom prst="straightConnector1">
+            <a:avLst/>
+          </a:prstGeom>
+          <a:ln w="50800">
+            <a:solidFill>
+              <a:schemeClr val="tx2">
+                <a:lumMod val="75000"/>
+                <a:lumOff val="25000"/>
+              </a:schemeClr>
+            </a:solidFill>
+            <a:tailEnd type="triangle"/>
+          </a:ln>
+        </p:spPr>
+        <p:style>
+          <a:lnRef idx="2">
+            <a:schemeClr val="accent1"/>
+          </a:lnRef>
+          <a:fillRef idx="0">
+            <a:schemeClr val="accent1"/>
+          </a:fillRef>
+          <a:effectRef idx="1">
+            <a:schemeClr val="accent1"/>
+          </a:effectRef>
+          <a:fontRef idx="minor">
+            <a:schemeClr val="tx1"/>
+          </a:fontRef>
+        </p:style>
+      </p:cxnSp>
+      <p:sp>
+        <p:nvSpPr>
+          <p:cNvPr id="42" name="テキスト ボックス 41">
+            <a:extLst>
+              <a:ext uri="{FF2B5EF4-FFF2-40B4-BE49-F238E27FC236}">
+                <a16:creationId xmlns:a16="http://schemas.microsoft.com/office/drawing/2014/main" id="{03680635-88CE-1B06-D29E-329526951342}"/>
+              </a:ext>
+            </a:extLst>
+          </p:cNvPr>
+          <p:cNvSpPr txBox="1"/>
+          <p:nvPr/>
+        </p:nvSpPr>
+        <p:spPr>
+          <a:xfrm>
+            <a:off x="887907" y="2625225"/>
+            <a:ext cx="2611612" cy="646331"/>
+          </a:xfrm>
+          <a:prstGeom prst="rect">
+            <a:avLst/>
+          </a:prstGeom>
+          <a:noFill/>
+        </p:spPr>
+        <p:txBody>
+          <a:bodyPr wrap="none" rtlCol="0">
+            <a:spAutoFit/>
+          </a:bodyPr>
+          <a:lstStyle/>
+          <a:p>
+            <a:r>
+              <a:rPr kumimoji="1" lang="en-US" altLang="ja-JP" dirty="0"/>
+              <a:t>4</a:t>
+            </a:r>
+            <a:r>
+              <a:rPr kumimoji="1" lang="ja-JP" altLang="en-US"/>
+              <a:t>進数に対応して</a:t>
+            </a:r>
+            <a:r>
+              <a:rPr kumimoji="1" lang="en-US" altLang="ja-JP" dirty="0"/>
+              <a:t>LED</a:t>
+            </a:r>
+            <a:r>
+              <a:rPr lang="ja-JP" altLang="en-US"/>
+              <a:t>を</a:t>
+            </a:r>
+            <a:endParaRPr lang="en-US" altLang="ja-JP" dirty="0"/>
+          </a:p>
+          <a:p>
+            <a:r>
+              <a:rPr kumimoji="1" lang="ja-JP" altLang="en-US"/>
+              <a:t>光らせる</a:t>
+            </a:r>
+          </a:p>
+        </p:txBody>
+      </p:sp>
+      <p:sp>
+        <p:nvSpPr>
+          <p:cNvPr id="43" name="テキスト ボックス 42">
+            <a:extLst>
+              <a:ext uri="{FF2B5EF4-FFF2-40B4-BE49-F238E27FC236}">
+                <a16:creationId xmlns:a16="http://schemas.microsoft.com/office/drawing/2014/main" id="{401ECFB1-1B41-36C1-CC66-431BCD23CA47}"/>
+              </a:ext>
+            </a:extLst>
+          </p:cNvPr>
+          <p:cNvSpPr txBox="1"/>
+          <p:nvPr/>
+        </p:nvSpPr>
+        <p:spPr>
+          <a:xfrm>
+            <a:off x="4969730" y="3293881"/>
+            <a:ext cx="2252540" cy="369332"/>
+          </a:xfrm>
+          <a:prstGeom prst="rect">
+            <a:avLst/>
+          </a:prstGeom>
+          <a:noFill/>
+        </p:spPr>
+        <p:txBody>
+          <a:bodyPr wrap="none" rtlCol="0">
+            <a:spAutoFit/>
+          </a:bodyPr>
+          <a:lstStyle/>
+          <a:p>
+            <a:r>
+              <a:rPr kumimoji="1" lang="ja-JP" altLang="en-US"/>
+              <a:t>各</a:t>
+            </a:r>
+            <a:r>
+              <a:rPr kumimoji="1" lang="en-US" altLang="ja-JP" dirty="0"/>
+              <a:t>LED</a:t>
+            </a:r>
+            <a:r>
+              <a:rPr kumimoji="1" lang="ja-JP" altLang="en-US"/>
+              <a:t>の発光を検知</a:t>
+            </a:r>
+          </a:p>
+        </p:txBody>
+      </p:sp>
+      <p:sp>
+        <p:nvSpPr>
+          <p:cNvPr id="44" name="テキスト ボックス 43">
+            <a:extLst>
+              <a:ext uri="{FF2B5EF4-FFF2-40B4-BE49-F238E27FC236}">
+                <a16:creationId xmlns:a16="http://schemas.microsoft.com/office/drawing/2014/main" id="{24615DB0-DBE9-5C1B-0E9D-D6B10F7C232A}"/>
+              </a:ext>
+            </a:extLst>
+          </p:cNvPr>
+          <p:cNvSpPr txBox="1"/>
+          <p:nvPr/>
+        </p:nvSpPr>
+        <p:spPr>
+          <a:xfrm>
+            <a:off x="8272438" y="2817430"/>
+            <a:ext cx="3082895" cy="369332"/>
+          </a:xfrm>
+          <a:prstGeom prst="rect">
+            <a:avLst/>
+          </a:prstGeom>
+          <a:noFill/>
+        </p:spPr>
+        <p:txBody>
+          <a:bodyPr wrap="none" rtlCol="0">
+            <a:spAutoFit/>
+          </a:bodyPr>
+          <a:lstStyle/>
+          <a:p>
+            <a:r>
+              <a:rPr kumimoji="1" lang="ja-JP" altLang="en-US"/>
+              <a:t>受信した</a:t>
+            </a:r>
+            <a:r>
+              <a:rPr kumimoji="1" lang="en-US" altLang="ja-JP" dirty="0"/>
+              <a:t>4</a:t>
+            </a:r>
+            <a:r>
+              <a:rPr kumimoji="1" lang="ja-JP" altLang="en-US"/>
+              <a:t>進数を配列に格納</a:t>
+            </a:r>
+          </a:p>
+        </p:txBody>
+      </p:sp>
+      <p:pic>
+        <p:nvPicPr>
+          <p:cNvPr id="52" name="図 51" descr="光 が含まれている画像&#10;&#10;自動的に生成された説明">
+            <a:extLst>
+              <a:ext uri="{FF2B5EF4-FFF2-40B4-BE49-F238E27FC236}">
+                <a16:creationId xmlns:a16="http://schemas.microsoft.com/office/drawing/2014/main" id="{B882D30E-A597-FAAC-2D82-A96A65D064B5}"/>
+              </a:ext>
+            </a:extLst>
+          </p:cNvPr>
+          <p:cNvPicPr>
+            <a:picLocks noChangeAspect="1"/>
+          </p:cNvPicPr>
+          <p:nvPr/>
+        </p:nvPicPr>
+        <p:blipFill>
+          <a:blip r:embed="rId4"/>
+          <a:stretch>
+            <a:fillRect/>
+          </a:stretch>
+        </p:blipFill>
+        <p:spPr>
+          <a:xfrm>
+            <a:off x="6961210" y="3807399"/>
+            <a:ext cx="878018" cy="1518069"/>
+          </a:xfrm>
+          <a:prstGeom prst="rect">
+            <a:avLst/>
+          </a:prstGeom>
+        </p:spPr>
+      </p:pic>
+      <p:pic>
+        <p:nvPicPr>
+          <p:cNvPr id="53" name="図 52" descr="光 が含まれている画像&#10;&#10;自動的に生成された説明">
+            <a:extLst>
+              <a:ext uri="{FF2B5EF4-FFF2-40B4-BE49-F238E27FC236}">
+                <a16:creationId xmlns:a16="http://schemas.microsoft.com/office/drawing/2014/main" id="{569E92C6-357A-9A2B-CA21-2BA58A2CB20C}"/>
+              </a:ext>
+            </a:extLst>
+          </p:cNvPr>
+          <p:cNvPicPr>
+            <a:picLocks noChangeAspect="1"/>
+          </p:cNvPicPr>
+          <p:nvPr/>
+        </p:nvPicPr>
+        <p:blipFill>
+          <a:blip r:embed="rId4"/>
+          <a:stretch>
+            <a:fillRect/>
+          </a:stretch>
+        </p:blipFill>
+        <p:spPr>
+          <a:xfrm>
+            <a:off x="7734933" y="3807399"/>
+            <a:ext cx="878018" cy="1518069"/>
+          </a:xfrm>
+          <a:prstGeom prst="rect">
+            <a:avLst/>
+          </a:prstGeom>
+        </p:spPr>
+      </p:pic>
+      <p:pic>
+        <p:nvPicPr>
+          <p:cNvPr id="54" name="図 53" descr="光 が含まれている画像&#10;&#10;自動的に生成された説明">
+            <a:extLst>
+              <a:ext uri="{FF2B5EF4-FFF2-40B4-BE49-F238E27FC236}">
+                <a16:creationId xmlns:a16="http://schemas.microsoft.com/office/drawing/2014/main" id="{75AF5869-C2A9-7AA7-C7A7-E925B0F80D14}"/>
+              </a:ext>
+            </a:extLst>
+          </p:cNvPr>
+          <p:cNvPicPr>
+            <a:picLocks noChangeAspect="1"/>
+          </p:cNvPicPr>
+          <p:nvPr/>
+        </p:nvPicPr>
+        <p:blipFill>
+          <a:blip r:embed="rId4"/>
+          <a:stretch>
+            <a:fillRect/>
+          </a:stretch>
+        </p:blipFill>
+        <p:spPr>
+          <a:xfrm>
+            <a:off x="8532103" y="3807399"/>
+            <a:ext cx="878018" cy="1518069"/>
+          </a:xfrm>
+          <a:prstGeom prst="rect">
+            <a:avLst/>
+          </a:prstGeom>
+        </p:spPr>
+      </p:pic>
+      <p:pic>
+        <p:nvPicPr>
+          <p:cNvPr id="55" name="図 54" descr="光 が含まれている画像&#10;&#10;自動的に生成された説明">
+            <a:extLst>
+              <a:ext uri="{FF2B5EF4-FFF2-40B4-BE49-F238E27FC236}">
+                <a16:creationId xmlns:a16="http://schemas.microsoft.com/office/drawing/2014/main" id="{782A8004-D636-C0EE-3D09-D54352603290}"/>
+              </a:ext>
+            </a:extLst>
+          </p:cNvPr>
+          <p:cNvPicPr>
+            <a:picLocks noChangeAspect="1"/>
+          </p:cNvPicPr>
+          <p:nvPr/>
+        </p:nvPicPr>
+        <p:blipFill>
+          <a:blip r:embed="rId4"/>
+          <a:stretch>
+            <a:fillRect/>
+          </a:stretch>
+        </p:blipFill>
+        <p:spPr>
+          <a:xfrm>
+            <a:off x="9411333" y="3807399"/>
+            <a:ext cx="878018" cy="1518069"/>
+          </a:xfrm>
+          <a:prstGeom prst="rect">
+            <a:avLst/>
+          </a:prstGeom>
+        </p:spPr>
+      </p:pic>
+      <p:pic>
+        <p:nvPicPr>
+          <p:cNvPr id="56" name="図 55" descr="光 が含まれている画像&#10;&#10;自動的に生成された説明">
+            <a:extLst>
+              <a:ext uri="{FF2B5EF4-FFF2-40B4-BE49-F238E27FC236}">
+                <a16:creationId xmlns:a16="http://schemas.microsoft.com/office/drawing/2014/main" id="{A1AD48E8-6B4C-6D72-E9E8-E74DEE48CBE2}"/>
+              </a:ext>
+            </a:extLst>
+          </p:cNvPr>
+          <p:cNvPicPr>
+            <a:picLocks noChangeAspect="1"/>
+          </p:cNvPicPr>
+          <p:nvPr/>
+        </p:nvPicPr>
+        <p:blipFill>
+          <a:blip r:embed="rId4"/>
+          <a:stretch>
+            <a:fillRect/>
+          </a:stretch>
+        </p:blipFill>
+        <p:spPr>
+          <a:xfrm>
+            <a:off x="10290564" y="3807399"/>
+            <a:ext cx="878018" cy="1518069"/>
+          </a:xfrm>
+          <a:prstGeom prst="rect">
+            <a:avLst/>
+          </a:prstGeom>
+        </p:spPr>
+      </p:pic>
+    </p:spTree>
+    <p:extLst>
+      <p:ext uri="{BB962C8B-B14F-4D97-AF65-F5344CB8AC3E}">
+        <p14:creationId xmlns:p14="http://schemas.microsoft.com/office/powerpoint/2010/main" val="4006340411"/>
+      </p:ext>
+    </p:extLst>
+  </p:cSld>
+  <p:clrMapOvr>
+    <a:masterClrMapping/>
+  </p:clrMapOvr>
+</p:sld>
+</file>
+
+<file path=ppt/slides/slide3.xml><?xml version="1.0" encoding="utf-8"?>
 <p:sld xmlns:a="http://schemas.openxmlformats.org/drawingml/2006/main" xmlns:r="http://schemas.openxmlformats.org/officeDocument/2006/relationships" xmlns:p="http://schemas.openxmlformats.org/presentationml/2006/main">
   <p:cSld>
     <p:spTree>
@@ -4205,10 +5028,10 @@
       </p:grpSpPr>
       <p:pic>
         <p:nvPicPr>
-          <p:cNvPr id="8" name="図 7" descr="電子機器の部品&#10;&#10;中程度の精度で自動的に生成された説明">
-            <a:extLst>
-              <a:ext uri="{FF2B5EF4-FFF2-40B4-BE49-F238E27FC236}">
-                <a16:creationId xmlns:a16="http://schemas.microsoft.com/office/drawing/2014/main" id="{2CFDCC55-0944-72D6-114D-2898C4ADD16E}"/>
+          <p:cNvPr id="6" name="図 5" descr="テーブル, 家具 が含まれている画像&#10;&#10;自動的に生成された説明">
+            <a:extLst>
+              <a:ext uri="{FF2B5EF4-FFF2-40B4-BE49-F238E27FC236}">
+                <a16:creationId xmlns:a16="http://schemas.microsoft.com/office/drawing/2014/main" id="{CD3295A1-46D7-4AF9-0A72-6C91E8042A94}"/>
               </a:ext>
             </a:extLst>
           </p:cNvPr>
@@ -4225,8 +5048,8 @@
         </p:blipFill>
         <p:spPr>
           <a:xfrm>
-            <a:off x="2262130" y="288103"/>
-            <a:ext cx="2803409" cy="2102557"/>
+            <a:off x="6474470" y="4002375"/>
+            <a:ext cx="2725917" cy="1495714"/>
           </a:xfrm>
           <a:prstGeom prst="rect">
             <a:avLst/>
@@ -4235,10 +5058,10 @@
       </p:pic>
       <p:pic>
         <p:nvPicPr>
-          <p:cNvPr id="12" name="図 11">
-            <a:extLst>
-              <a:ext uri="{FF2B5EF4-FFF2-40B4-BE49-F238E27FC236}">
-                <a16:creationId xmlns:a16="http://schemas.microsoft.com/office/drawing/2014/main" id="{9063B56F-7ADC-7C51-CE76-1D0C22E99305}"/>
+          <p:cNvPr id="8" name="図 7" descr="図形&#10;&#10;自動的に生成された説明">
+            <a:extLst>
+              <a:ext uri="{FF2B5EF4-FFF2-40B4-BE49-F238E27FC236}">
+                <a16:creationId xmlns:a16="http://schemas.microsoft.com/office/drawing/2014/main" id="{6205201C-1300-4FC1-1318-E647E77A6FAD}"/>
               </a:ext>
             </a:extLst>
           </p:cNvPr>
@@ -4255,8 +5078,8 @@
         </p:blipFill>
         <p:spPr>
           <a:xfrm>
-            <a:off x="966070" y="3707282"/>
-            <a:ext cx="878019" cy="1608253"/>
+            <a:off x="3040798" y="3673042"/>
+            <a:ext cx="1035300" cy="1825047"/>
           </a:xfrm>
           <a:prstGeom prst="rect">
             <a:avLst/>
@@ -4265,10 +5088,10 @@
       </p:pic>
       <p:pic>
         <p:nvPicPr>
-          <p:cNvPr id="14" name="図 13" descr="電子機器の部品&#10;&#10;中程度の精度で自動的に生成された説明">
-            <a:extLst>
-              <a:ext uri="{FF2B5EF4-FFF2-40B4-BE49-F238E27FC236}">
-                <a16:creationId xmlns:a16="http://schemas.microsoft.com/office/drawing/2014/main" id="{E79CA363-1B9C-77F0-514D-7333CF9211CA}"/>
+          <p:cNvPr id="9" name="図 8" descr="電子機器の部品&#10;&#10;中程度の精度で自動的に生成された説明">
+            <a:extLst>
+              <a:ext uri="{FF2B5EF4-FFF2-40B4-BE49-F238E27FC236}">
+                <a16:creationId xmlns:a16="http://schemas.microsoft.com/office/drawing/2014/main" id="{DF9EBB7A-368F-083D-02E6-A0D7D82DFF6B}"/>
               </a:ext>
             </a:extLst>
           </p:cNvPr>
@@ -4278,14 +5101,14 @@
           <p:nvPr/>
         </p:nvPicPr>
         <p:blipFill>
-          <a:blip r:embed="rId2"/>
+          <a:blip r:embed="rId4"/>
           <a:stretch>
             <a:fillRect/>
           </a:stretch>
         </p:blipFill>
         <p:spPr>
           <a:xfrm>
-            <a:off x="7126463" y="288102"/>
+            <a:off x="2262129" y="288102"/>
             <a:ext cx="2803409" cy="2102557"/>
           </a:xfrm>
           <a:prstGeom prst="rect">
@@ -4295,10 +5118,10 @@
       </p:pic>
       <p:pic>
         <p:nvPicPr>
-          <p:cNvPr id="15" name="図 14">
-            <a:extLst>
-              <a:ext uri="{FF2B5EF4-FFF2-40B4-BE49-F238E27FC236}">
-                <a16:creationId xmlns:a16="http://schemas.microsoft.com/office/drawing/2014/main" id="{58D0ACCA-ACD9-3546-4994-487C1C0D8682}"/>
+          <p:cNvPr id="10" name="図 9" descr="電子機器の部品&#10;&#10;中程度の精度で自動的に生成された説明">
+            <a:extLst>
+              <a:ext uri="{FF2B5EF4-FFF2-40B4-BE49-F238E27FC236}">
+                <a16:creationId xmlns:a16="http://schemas.microsoft.com/office/drawing/2014/main" id="{8775843C-17DE-5C7E-80D9-79E8E5788CE1}"/>
               </a:ext>
             </a:extLst>
           </p:cNvPr>
@@ -4308,117 +5131,27 @@
           <p:nvPr/>
         </p:nvPicPr>
         <p:blipFill>
-          <a:blip r:embed="rId3"/>
+          <a:blip r:embed="rId4"/>
           <a:stretch>
             <a:fillRect/>
           </a:stretch>
         </p:blipFill>
         <p:spPr>
           <a:xfrm>
-            <a:off x="1844089" y="3707282"/>
-            <a:ext cx="878019" cy="1608253"/>
+            <a:off x="6598262" y="258404"/>
+            <a:ext cx="2803409" cy="2102557"/>
           </a:xfrm>
           <a:prstGeom prst="rect">
             <a:avLst/>
           </a:prstGeom>
         </p:spPr>
       </p:pic>
-      <p:pic>
-        <p:nvPicPr>
-          <p:cNvPr id="16" name="図 15">
-            <a:extLst>
-              <a:ext uri="{FF2B5EF4-FFF2-40B4-BE49-F238E27FC236}">
-                <a16:creationId xmlns:a16="http://schemas.microsoft.com/office/drawing/2014/main" id="{DB80488C-E1AE-935E-D486-F1943751007C}"/>
-              </a:ext>
-            </a:extLst>
-          </p:cNvPr>
-          <p:cNvPicPr>
-            <a:picLocks noChangeAspect="1"/>
-          </p:cNvPicPr>
-          <p:nvPr/>
-        </p:nvPicPr>
-        <p:blipFill>
-          <a:blip r:embed="rId3"/>
-          <a:stretch>
-            <a:fillRect/>
-          </a:stretch>
-        </p:blipFill>
-        <p:spPr>
-          <a:xfrm>
-            <a:off x="2722108" y="3707282"/>
-            <a:ext cx="878019" cy="1608253"/>
-          </a:xfrm>
-          <a:prstGeom prst="rect">
-            <a:avLst/>
-          </a:prstGeom>
-        </p:spPr>
-      </p:pic>
-      <p:pic>
-        <p:nvPicPr>
-          <p:cNvPr id="17" name="図 16">
-            <a:extLst>
-              <a:ext uri="{FF2B5EF4-FFF2-40B4-BE49-F238E27FC236}">
-                <a16:creationId xmlns:a16="http://schemas.microsoft.com/office/drawing/2014/main" id="{EF330DE2-CC24-E634-48DC-FE78A1BA2335}"/>
-              </a:ext>
-            </a:extLst>
-          </p:cNvPr>
-          <p:cNvPicPr>
-            <a:picLocks noChangeAspect="1"/>
-          </p:cNvPicPr>
-          <p:nvPr/>
-        </p:nvPicPr>
-        <p:blipFill>
-          <a:blip r:embed="rId3"/>
-          <a:stretch>
-            <a:fillRect/>
-          </a:stretch>
-        </p:blipFill>
-        <p:spPr>
-          <a:xfrm>
-            <a:off x="3498201" y="3707281"/>
-            <a:ext cx="878019" cy="1608253"/>
-          </a:xfrm>
-          <a:prstGeom prst="rect">
-            <a:avLst/>
-          </a:prstGeom>
-        </p:spPr>
-      </p:pic>
-      <p:pic>
-        <p:nvPicPr>
-          <p:cNvPr id="18" name="図 17">
-            <a:extLst>
-              <a:ext uri="{FF2B5EF4-FFF2-40B4-BE49-F238E27FC236}">
-                <a16:creationId xmlns:a16="http://schemas.microsoft.com/office/drawing/2014/main" id="{663085E1-F236-B9A3-B976-1C98CCCF792D}"/>
-              </a:ext>
-            </a:extLst>
-          </p:cNvPr>
-          <p:cNvPicPr>
-            <a:picLocks noChangeAspect="1"/>
-          </p:cNvPicPr>
-          <p:nvPr/>
-        </p:nvPicPr>
-        <p:blipFill>
-          <a:blip r:embed="rId3"/>
-          <a:stretch>
-            <a:fillRect/>
-          </a:stretch>
-        </p:blipFill>
-        <p:spPr>
-          <a:xfrm>
-            <a:off x="4379929" y="3707281"/>
-            <a:ext cx="878019" cy="1608253"/>
-          </a:xfrm>
-          <a:prstGeom prst="rect">
-            <a:avLst/>
-          </a:prstGeom>
-        </p:spPr>
-      </p:pic>
-      <p:sp>
-        <p:nvSpPr>
-          <p:cNvPr id="19" name="テキスト ボックス 18">
-            <a:extLst>
-              <a:ext uri="{FF2B5EF4-FFF2-40B4-BE49-F238E27FC236}">
-                <a16:creationId xmlns:a16="http://schemas.microsoft.com/office/drawing/2014/main" id="{8D31FB83-B025-2989-A41E-0D4EEC501D3F}"/>
+      <p:sp>
+        <p:nvSpPr>
+          <p:cNvPr id="11" name="テキスト ボックス 10">
+            <a:extLst>
+              <a:ext uri="{FF2B5EF4-FFF2-40B4-BE49-F238E27FC236}">
+                <a16:creationId xmlns:a16="http://schemas.microsoft.com/office/drawing/2014/main" id="{869A2130-FC23-ED12-EF44-99047479F639}"/>
               </a:ext>
             </a:extLst>
           </p:cNvPr>
@@ -4427,8 +5160,8 @@
         </p:nvSpPr>
         <p:spPr>
           <a:xfrm>
-            <a:off x="3111797" y="5596568"/>
-            <a:ext cx="636713" cy="369332"/>
+            <a:off x="1211855" y="638978"/>
+            <a:ext cx="1933543" cy="369332"/>
           </a:xfrm>
           <a:prstGeom prst="rect">
             <a:avLst/>
@@ -4442,8 +5175,12 @@
           <a:lstStyle/>
           <a:p>
             <a:r>
-              <a:rPr kumimoji="1" lang="en-US" altLang="ja-JP" dirty="0"/>
-              <a:t>LED</a:t>
+              <a:rPr lang="en-US" altLang="ja-JP" dirty="0"/>
+              <a:t>Arduino</a:t>
+            </a:r>
+            <a:r>
+              <a:rPr lang="ja-JP" altLang="en-US"/>
+              <a:t>（送信）</a:t>
             </a:r>
             <a:endParaRPr kumimoji="1" lang="ja-JP" altLang="en-US"/>
           </a:p>
@@ -4451,10 +5188,10 @@
       </p:sp>
       <p:sp>
         <p:nvSpPr>
-          <p:cNvPr id="28" name="テキスト ボックス 27">
-            <a:extLst>
-              <a:ext uri="{FF2B5EF4-FFF2-40B4-BE49-F238E27FC236}">
-                <a16:creationId xmlns:a16="http://schemas.microsoft.com/office/drawing/2014/main" id="{F3681FCC-E1AB-A1A8-C494-E41D655A4C53}"/>
+          <p:cNvPr id="12" name="テキスト ボックス 11">
+            <a:extLst>
+              <a:ext uri="{FF2B5EF4-FFF2-40B4-BE49-F238E27FC236}">
+                <a16:creationId xmlns:a16="http://schemas.microsoft.com/office/drawing/2014/main" id="{890E4178-C851-58DA-4A55-253872274021}"/>
               </a:ext>
             </a:extLst>
           </p:cNvPr>
@@ -4463,8 +5200,8 @@
         </p:nvSpPr>
         <p:spPr>
           <a:xfrm>
-            <a:off x="8300733" y="5596568"/>
-            <a:ext cx="1338828" cy="369332"/>
+            <a:off x="9594043" y="522768"/>
+            <a:ext cx="1933543" cy="369332"/>
           </a:xfrm>
           <a:prstGeom prst="rect">
             <a:avLst/>
@@ -4478,18 +5215,23 @@
           <a:lstStyle/>
           <a:p>
             <a:r>
-              <a:rPr kumimoji="1" lang="ja-JP" altLang="en-US"/>
-              <a:t>照度センサ</a:t>
-            </a:r>
+              <a:rPr lang="en-US" altLang="ja-JP" dirty="0"/>
+              <a:t>Arduino</a:t>
+            </a:r>
+            <a:r>
+              <a:rPr lang="ja-JP" altLang="en-US"/>
+              <a:t>（受信）</a:t>
+            </a:r>
+            <a:endParaRPr kumimoji="1" lang="ja-JP" altLang="en-US"/>
           </a:p>
         </p:txBody>
       </p:sp>
       <p:cxnSp>
         <p:nvCxnSpPr>
-          <p:cNvPr id="30" name="直線矢印コネクタ 29">
-            <a:extLst>
-              <a:ext uri="{FF2B5EF4-FFF2-40B4-BE49-F238E27FC236}">
-                <a16:creationId xmlns:a16="http://schemas.microsoft.com/office/drawing/2014/main" id="{24C265FA-A6E9-3470-B7A4-A4CA6010DA69}"/>
+          <p:cNvPr id="13" name="直線矢印コネクタ 12">
+            <a:extLst>
+              <a:ext uri="{FF2B5EF4-FFF2-40B4-BE49-F238E27FC236}">
+                <a16:creationId xmlns:a16="http://schemas.microsoft.com/office/drawing/2014/main" id="{81DC24B8-0AC4-D53D-9B1F-3A4AADCA6CC9}"/>
               </a:ext>
             </a:extLst>
           </p:cNvPr>
@@ -4502,133 +5244,6 @@
           <a:xfrm>
             <a:off x="3558448" y="2390659"/>
             <a:ext cx="0" cy="1156772"/>
-          </a:xfrm>
-          <a:prstGeom prst="straightConnector1">
-            <a:avLst/>
-          </a:prstGeom>
-          <a:ln w="50800">
-            <a:solidFill>
-              <a:schemeClr val="tx2">
-                <a:lumMod val="75000"/>
-                <a:lumOff val="25000"/>
-              </a:schemeClr>
-            </a:solidFill>
-            <a:tailEnd type="triangle"/>
-          </a:ln>
-        </p:spPr>
-        <p:style>
-          <a:lnRef idx="2">
-            <a:schemeClr val="accent1"/>
-          </a:lnRef>
-          <a:fillRef idx="0">
-            <a:schemeClr val="accent1"/>
-          </a:fillRef>
-          <a:effectRef idx="1">
-            <a:schemeClr val="accent1"/>
-          </a:effectRef>
-          <a:fontRef idx="minor">
-            <a:schemeClr val="tx1"/>
-          </a:fontRef>
-        </p:style>
-      </p:cxnSp>
-      <p:sp>
-        <p:nvSpPr>
-          <p:cNvPr id="34" name="テキスト ボックス 33">
-            <a:extLst>
-              <a:ext uri="{FF2B5EF4-FFF2-40B4-BE49-F238E27FC236}">
-                <a16:creationId xmlns:a16="http://schemas.microsoft.com/office/drawing/2014/main" id="{074DB4C8-337D-C1D9-6948-B7CD1B4D354F}"/>
-              </a:ext>
-            </a:extLst>
-          </p:cNvPr>
-          <p:cNvSpPr txBox="1"/>
-          <p:nvPr/>
-        </p:nvSpPr>
-        <p:spPr>
-          <a:xfrm>
-            <a:off x="1211855" y="638978"/>
-            <a:ext cx="1933543" cy="369332"/>
-          </a:xfrm>
-          <a:prstGeom prst="rect">
-            <a:avLst/>
-          </a:prstGeom>
-          <a:noFill/>
-        </p:spPr>
-        <p:txBody>
-          <a:bodyPr wrap="none" rtlCol="0">
-            <a:spAutoFit/>
-          </a:bodyPr>
-          <a:lstStyle/>
-          <a:p>
-            <a:r>
-              <a:rPr lang="en-US" altLang="ja-JP" dirty="0"/>
-              <a:t>Arduino</a:t>
-            </a:r>
-            <a:r>
-              <a:rPr lang="ja-JP" altLang="en-US"/>
-              <a:t>（送信）</a:t>
-            </a:r>
-            <a:endParaRPr kumimoji="1" lang="ja-JP" altLang="en-US"/>
-          </a:p>
-        </p:txBody>
-      </p:sp>
-      <p:sp>
-        <p:nvSpPr>
-          <p:cNvPr id="35" name="テキスト ボックス 34">
-            <a:extLst>
-              <a:ext uri="{FF2B5EF4-FFF2-40B4-BE49-F238E27FC236}">
-                <a16:creationId xmlns:a16="http://schemas.microsoft.com/office/drawing/2014/main" id="{3FA7B19C-5BED-C6AC-71DC-2AB98AA0C875}"/>
-              </a:ext>
-            </a:extLst>
-          </p:cNvPr>
-          <p:cNvSpPr txBox="1"/>
-          <p:nvPr/>
-        </p:nvSpPr>
-        <p:spPr>
-          <a:xfrm>
-            <a:off x="9594043" y="522768"/>
-            <a:ext cx="1933543" cy="369332"/>
-          </a:xfrm>
-          <a:prstGeom prst="rect">
-            <a:avLst/>
-          </a:prstGeom>
-          <a:noFill/>
-        </p:spPr>
-        <p:txBody>
-          <a:bodyPr wrap="none" rtlCol="0">
-            <a:spAutoFit/>
-          </a:bodyPr>
-          <a:lstStyle/>
-          <a:p>
-            <a:r>
-              <a:rPr lang="en-US" altLang="ja-JP" dirty="0"/>
-              <a:t>Arduino</a:t>
-            </a:r>
-            <a:r>
-              <a:rPr lang="ja-JP" altLang="en-US"/>
-              <a:t>（受信）</a:t>
-            </a:r>
-            <a:endParaRPr kumimoji="1" lang="ja-JP" altLang="en-US"/>
-          </a:p>
-        </p:txBody>
-      </p:sp>
-      <p:cxnSp>
-        <p:nvCxnSpPr>
-          <p:cNvPr id="37" name="直線矢印コネクタ 36">
-            <a:extLst>
-              <a:ext uri="{FF2B5EF4-FFF2-40B4-BE49-F238E27FC236}">
-                <a16:creationId xmlns:a16="http://schemas.microsoft.com/office/drawing/2014/main" id="{EA20C39F-A5D9-EB29-7C2C-5021271B5B32}"/>
-              </a:ext>
-            </a:extLst>
-          </p:cNvPr>
-          <p:cNvCxnSpPr>
-            <a:cxnSpLocks/>
-          </p:cNvCxnSpPr>
-          <p:nvPr/>
-        </p:nvCxnSpPr>
-        <p:spPr>
-          <a:xfrm>
-            <a:off x="5381525" y="4423271"/>
-            <a:ext cx="1184213" cy="0"/>
           </a:xfrm>
           <a:prstGeom prst="straightConnector1">
             <a:avLst/>
@@ -4660,10 +5275,10 @@
       </p:cxnSp>
       <p:cxnSp>
         <p:nvCxnSpPr>
-          <p:cNvPr id="38" name="直線矢印コネクタ 37">
-            <a:extLst>
-              <a:ext uri="{FF2B5EF4-FFF2-40B4-BE49-F238E27FC236}">
-                <a16:creationId xmlns:a16="http://schemas.microsoft.com/office/drawing/2014/main" id="{55B969F8-A9FD-5D7F-004B-76EFD028B9CE}"/>
+          <p:cNvPr id="14" name="直線矢印コネクタ 13">
+            <a:extLst>
+              <a:ext uri="{FF2B5EF4-FFF2-40B4-BE49-F238E27FC236}">
+                <a16:creationId xmlns:a16="http://schemas.microsoft.com/office/drawing/2014/main" id="{1FA307C4-6881-4DFD-BFB2-177C1D117157}"/>
               </a:ext>
             </a:extLst>
           </p:cNvPr>
@@ -4673,7 +5288,7 @@
           <p:nvPr/>
         </p:nvCxnSpPr>
         <p:spPr>
-          <a:xfrm>
+          <a:xfrm rot="10800000">
             <a:off x="7711807" y="2423710"/>
             <a:ext cx="0" cy="1156772"/>
           </a:xfrm>
@@ -4707,10 +5322,10 @@
       </p:cxnSp>
       <p:sp>
         <p:nvSpPr>
-          <p:cNvPr id="42" name="テキスト ボックス 41">
-            <a:extLst>
-              <a:ext uri="{FF2B5EF4-FFF2-40B4-BE49-F238E27FC236}">
-                <a16:creationId xmlns:a16="http://schemas.microsoft.com/office/drawing/2014/main" id="{03680635-88CE-1B06-D29E-329526951342}"/>
+          <p:cNvPr id="15" name="テキスト ボックス 14">
+            <a:extLst>
+              <a:ext uri="{FF2B5EF4-FFF2-40B4-BE49-F238E27FC236}">
+                <a16:creationId xmlns:a16="http://schemas.microsoft.com/office/drawing/2014/main" id="{36712AAA-4903-3006-9C5A-61ECBBB2F63B}"/>
               </a:ext>
             </a:extLst>
           </p:cNvPr>
@@ -4719,8 +5334,8 @@
         </p:nvSpPr>
         <p:spPr>
           <a:xfrm>
-            <a:off x="887907" y="2625225"/>
-            <a:ext cx="2611612" cy="646331"/>
+            <a:off x="4566937" y="3699966"/>
+            <a:ext cx="2031325" cy="369332"/>
           </a:xfrm>
           <a:prstGeom prst="rect">
             <a:avLst/>
@@ -4734,37 +5349,19 @@
           <a:lstStyle/>
           <a:p>
             <a:r>
-              <a:rPr kumimoji="1" lang="en-US" altLang="ja-JP" dirty="0"/>
-              <a:t>4</a:t>
-            </a:r>
-            <a:r>
-              <a:rPr kumimoji="1" lang="ja-JP" altLang="en-US"/>
-              <a:t>進数に対応して</a:t>
-            </a:r>
-            <a:r>
-              <a:rPr kumimoji="1" lang="en-US" altLang="ja-JP" dirty="0"/>
-              <a:t>LED</a:t>
-            </a:r>
-            <a:r>
               <a:rPr lang="ja-JP" altLang="en-US"/>
-              <a:t>を</a:t>
-            </a:r>
-            <a:endParaRPr lang="en-US" altLang="ja-JP" dirty="0"/>
-          </a:p>
-          <a:p>
-            <a:r>
-              <a:rPr kumimoji="1" lang="ja-JP" altLang="en-US"/>
-              <a:t>光らせる</a:t>
-            </a:r>
-          </a:p>
-        </p:txBody>
-      </p:sp>
-      <p:sp>
-        <p:nvSpPr>
-          <p:cNvPr id="43" name="テキスト ボックス 42">
-            <a:extLst>
-              <a:ext uri="{FF2B5EF4-FFF2-40B4-BE49-F238E27FC236}">
-                <a16:creationId xmlns:a16="http://schemas.microsoft.com/office/drawing/2014/main" id="{401ECFB1-1B41-36C1-CC66-431BCD23CA47}"/>
+              <a:t>振動の有無を検知</a:t>
+            </a:r>
+            <a:endParaRPr kumimoji="1" lang="ja-JP" altLang="en-US"/>
+          </a:p>
+        </p:txBody>
+      </p:sp>
+      <p:sp>
+        <p:nvSpPr>
+          <p:cNvPr id="16" name="テキスト ボックス 15">
+            <a:extLst>
+              <a:ext uri="{FF2B5EF4-FFF2-40B4-BE49-F238E27FC236}">
+                <a16:creationId xmlns:a16="http://schemas.microsoft.com/office/drawing/2014/main" id="{728CE036-B72A-C1BC-872C-8B10FF9FC7A5}"/>
               </a:ext>
             </a:extLst>
           </p:cNvPr>
@@ -4773,8 +5370,8 @@
         </p:nvSpPr>
         <p:spPr>
           <a:xfrm>
-            <a:off x="4969730" y="3293881"/>
-            <a:ext cx="2252540" cy="369332"/>
+            <a:off x="8272438" y="2817430"/>
+            <a:ext cx="3082895" cy="369332"/>
           </a:xfrm>
           <a:prstGeom prst="rect">
             <a:avLst/>
@@ -4789,25 +5386,25 @@
           <a:p>
             <a:r>
               <a:rPr kumimoji="1" lang="ja-JP" altLang="en-US"/>
-              <a:t>各</a:t>
-            </a:r>
-            <a:r>
-              <a:rPr kumimoji="1" lang="en-US" altLang="ja-JP" dirty="0"/>
-              <a:t>LED</a:t>
-            </a:r>
-            <a:r>
-              <a:rPr kumimoji="1" lang="ja-JP" altLang="en-US"/>
-              <a:t>の発光を検知</a:t>
-            </a:r>
-          </a:p>
-        </p:txBody>
-      </p:sp>
-      <p:sp>
-        <p:nvSpPr>
-          <p:cNvPr id="44" name="テキスト ボックス 43">
-            <a:extLst>
-              <a:ext uri="{FF2B5EF4-FFF2-40B4-BE49-F238E27FC236}">
-                <a16:creationId xmlns:a16="http://schemas.microsoft.com/office/drawing/2014/main" id="{24615DB0-DBE9-5C1B-0E9D-D6B10F7C232A}"/>
+              <a:t>受信した</a:t>
+            </a:r>
+            <a:r>
+              <a:rPr lang="en-US" altLang="ja-JP" dirty="0"/>
+              <a:t>2</a:t>
+            </a:r>
+            <a:r>
+              <a:rPr kumimoji="1" lang="ja-JP" altLang="en-US"/>
+              <a:t>進数を配列に格納</a:t>
+            </a:r>
+          </a:p>
+        </p:txBody>
+      </p:sp>
+      <p:sp>
+        <p:nvSpPr>
+          <p:cNvPr id="17" name="テキスト ボックス 16">
+            <a:extLst>
+              <a:ext uri="{FF2B5EF4-FFF2-40B4-BE49-F238E27FC236}">
+                <a16:creationId xmlns:a16="http://schemas.microsoft.com/office/drawing/2014/main" id="{2F391C02-4373-A4DC-2BDD-71D797FC5E5D}"/>
               </a:ext>
             </a:extLst>
           </p:cNvPr>
@@ -4816,8 +5413,8 @@
         </p:nvSpPr>
         <p:spPr>
           <a:xfrm>
-            <a:off x="8272438" y="2817430"/>
-            <a:ext cx="3082895" cy="369332"/>
+            <a:off x="2790329" y="5531241"/>
+            <a:ext cx="1338828" cy="369332"/>
           </a:xfrm>
           <a:prstGeom prst="rect">
             <a:avLst/>
@@ -4832,173 +5429,140 @@
           <a:p>
             <a:r>
               <a:rPr kumimoji="1" lang="ja-JP" altLang="en-US"/>
-              <a:t>受信した</a:t>
-            </a:r>
-            <a:r>
-              <a:rPr kumimoji="1" lang="en-US" altLang="ja-JP" dirty="0"/>
-              <a:t>4</a:t>
-            </a:r>
-            <a:r>
-              <a:rPr kumimoji="1" lang="ja-JP" altLang="en-US"/>
-              <a:t>進数を配列に格納</a:t>
-            </a:r>
-          </a:p>
-        </p:txBody>
-      </p:sp>
-      <p:pic>
-        <p:nvPicPr>
-          <p:cNvPr id="52" name="図 51" descr="光 が含まれている画像&#10;&#10;自動的に生成された説明">
-            <a:extLst>
-              <a:ext uri="{FF2B5EF4-FFF2-40B4-BE49-F238E27FC236}">
-                <a16:creationId xmlns:a16="http://schemas.microsoft.com/office/drawing/2014/main" id="{B882D30E-A597-FAAC-2D82-A96A65D064B5}"/>
-              </a:ext>
-            </a:extLst>
-          </p:cNvPr>
-          <p:cNvPicPr>
-            <a:picLocks noChangeAspect="1"/>
-          </p:cNvPicPr>
+              <a:t>振動モータ</a:t>
+            </a:r>
+          </a:p>
+        </p:txBody>
+      </p:sp>
+      <p:sp>
+        <p:nvSpPr>
+          <p:cNvPr id="18" name="テキスト ボックス 17">
+            <a:extLst>
+              <a:ext uri="{FF2B5EF4-FFF2-40B4-BE49-F238E27FC236}">
+                <a16:creationId xmlns:a16="http://schemas.microsoft.com/office/drawing/2014/main" id="{7A7CBCF0-9CC4-520B-C877-7C40160F5AB5}"/>
+              </a:ext>
+            </a:extLst>
+          </p:cNvPr>
+          <p:cNvSpPr txBox="1"/>
           <p:nvPr/>
-        </p:nvPicPr>
-        <p:blipFill>
-          <a:blip r:embed="rId4"/>
-          <a:stretch>
-            <a:fillRect/>
-          </a:stretch>
-        </p:blipFill>
-        <p:spPr>
-          <a:xfrm>
-            <a:off x="6961210" y="3807399"/>
-            <a:ext cx="878018" cy="1518069"/>
+        </p:nvSpPr>
+        <p:spPr>
+          <a:xfrm>
+            <a:off x="7472938" y="5597421"/>
+            <a:ext cx="1928733" cy="369332"/>
           </a:xfrm>
           <a:prstGeom prst="rect">
             <a:avLst/>
           </a:prstGeom>
-        </p:spPr>
-      </p:pic>
-      <p:pic>
-        <p:nvPicPr>
-          <p:cNvPr id="53" name="図 52" descr="光 が含まれている画像&#10;&#10;自動的に生成された説明">
-            <a:extLst>
-              <a:ext uri="{FF2B5EF4-FFF2-40B4-BE49-F238E27FC236}">
-                <a16:creationId xmlns:a16="http://schemas.microsoft.com/office/drawing/2014/main" id="{569E92C6-357A-9A2B-CA21-2BA58A2CB20C}"/>
-              </a:ext>
-            </a:extLst>
-          </p:cNvPr>
-          <p:cNvPicPr>
-            <a:picLocks noChangeAspect="1"/>
-          </p:cNvPicPr>
+          <a:noFill/>
+        </p:spPr>
+        <p:txBody>
+          <a:bodyPr wrap="none" rtlCol="0">
+            <a:spAutoFit/>
+          </a:bodyPr>
+          <a:lstStyle/>
+          <a:p>
+            <a:r>
+              <a:rPr kumimoji="1" lang="en-US" altLang="ja-JP" dirty="0"/>
+              <a:t>3</a:t>
+            </a:r>
+            <a:r>
+              <a:rPr kumimoji="1" lang="ja-JP" altLang="en-US"/>
+              <a:t>軸加速度センサ</a:t>
+            </a:r>
+          </a:p>
+        </p:txBody>
+      </p:sp>
+      <p:cxnSp>
+        <p:nvCxnSpPr>
+          <p:cNvPr id="21" name="直線矢印コネクタ 20">
+            <a:extLst>
+              <a:ext uri="{FF2B5EF4-FFF2-40B4-BE49-F238E27FC236}">
+                <a16:creationId xmlns:a16="http://schemas.microsoft.com/office/drawing/2014/main" id="{1D808D3B-509C-AB00-5CAF-E9947E8E6466}"/>
+              </a:ext>
+            </a:extLst>
+          </p:cNvPr>
+          <p:cNvCxnSpPr>
+            <a:cxnSpLocks/>
+          </p:cNvCxnSpPr>
           <p:nvPr/>
-        </p:nvPicPr>
-        <p:blipFill>
-          <a:blip r:embed="rId4"/>
-          <a:stretch>
-            <a:fillRect/>
-          </a:stretch>
-        </p:blipFill>
-        <p:spPr>
-          <a:xfrm>
-            <a:off x="7734933" y="3807399"/>
-            <a:ext cx="878018" cy="1518069"/>
+        </p:nvCxnSpPr>
+        <p:spPr>
+          <a:xfrm>
+            <a:off x="4566937" y="4520252"/>
+            <a:ext cx="1998801" cy="0"/>
+          </a:xfrm>
+          <a:prstGeom prst="straightConnector1">
+            <a:avLst/>
+          </a:prstGeom>
+          <a:ln w="50800">
+            <a:solidFill>
+              <a:schemeClr val="tx2">
+                <a:lumMod val="75000"/>
+                <a:lumOff val="25000"/>
+              </a:schemeClr>
+            </a:solidFill>
+            <a:tailEnd type="triangle"/>
+          </a:ln>
+        </p:spPr>
+        <p:style>
+          <a:lnRef idx="2">
+            <a:schemeClr val="accent1"/>
+          </a:lnRef>
+          <a:fillRef idx="0">
+            <a:schemeClr val="accent1"/>
+          </a:fillRef>
+          <a:effectRef idx="1">
+            <a:schemeClr val="accent1"/>
+          </a:effectRef>
+          <a:fontRef idx="minor">
+            <a:schemeClr val="tx1"/>
+          </a:fontRef>
+        </p:style>
+      </p:cxnSp>
+      <p:sp>
+        <p:nvSpPr>
+          <p:cNvPr id="23" name="テキスト ボックス 22">
+            <a:extLst>
+              <a:ext uri="{FF2B5EF4-FFF2-40B4-BE49-F238E27FC236}">
+                <a16:creationId xmlns:a16="http://schemas.microsoft.com/office/drawing/2014/main" id="{FDA00BB5-6400-14B4-C3A3-8B73C178107D}"/>
+              </a:ext>
+            </a:extLst>
+          </p:cNvPr>
+          <p:cNvSpPr txBox="1"/>
+          <p:nvPr/>
+        </p:nvSpPr>
+        <p:spPr>
+          <a:xfrm>
+            <a:off x="706385" y="2741535"/>
+            <a:ext cx="2852063" cy="369332"/>
           </a:xfrm>
           <a:prstGeom prst="rect">
             <a:avLst/>
           </a:prstGeom>
-        </p:spPr>
-      </p:pic>
-      <p:pic>
-        <p:nvPicPr>
-          <p:cNvPr id="54" name="図 53" descr="光 が含まれている画像&#10;&#10;自動的に生成された説明">
-            <a:extLst>
-              <a:ext uri="{FF2B5EF4-FFF2-40B4-BE49-F238E27FC236}">
-                <a16:creationId xmlns:a16="http://schemas.microsoft.com/office/drawing/2014/main" id="{75AF5869-C2A9-7AA7-C7A7-E925B0F80D14}"/>
-              </a:ext>
-            </a:extLst>
-          </p:cNvPr>
-          <p:cNvPicPr>
-            <a:picLocks noChangeAspect="1"/>
-          </p:cNvPicPr>
-          <p:nvPr/>
-        </p:nvPicPr>
-        <p:blipFill>
-          <a:blip r:embed="rId4"/>
-          <a:stretch>
-            <a:fillRect/>
-          </a:stretch>
-        </p:blipFill>
-        <p:spPr>
-          <a:xfrm>
-            <a:off x="8532103" y="3807399"/>
-            <a:ext cx="878018" cy="1518069"/>
-          </a:xfrm>
-          <a:prstGeom prst="rect">
-            <a:avLst/>
-          </a:prstGeom>
-        </p:spPr>
-      </p:pic>
-      <p:pic>
-        <p:nvPicPr>
-          <p:cNvPr id="55" name="図 54" descr="光 が含まれている画像&#10;&#10;自動的に生成された説明">
-            <a:extLst>
-              <a:ext uri="{FF2B5EF4-FFF2-40B4-BE49-F238E27FC236}">
-                <a16:creationId xmlns:a16="http://schemas.microsoft.com/office/drawing/2014/main" id="{782A8004-D636-C0EE-3D09-D54352603290}"/>
-              </a:ext>
-            </a:extLst>
-          </p:cNvPr>
-          <p:cNvPicPr>
-            <a:picLocks noChangeAspect="1"/>
-          </p:cNvPicPr>
-          <p:nvPr/>
-        </p:nvPicPr>
-        <p:blipFill>
-          <a:blip r:embed="rId4"/>
-          <a:stretch>
-            <a:fillRect/>
-          </a:stretch>
-        </p:blipFill>
-        <p:spPr>
-          <a:xfrm>
-            <a:off x="9411333" y="3807399"/>
-            <a:ext cx="878018" cy="1518069"/>
-          </a:xfrm>
-          <a:prstGeom prst="rect">
-            <a:avLst/>
-          </a:prstGeom>
-        </p:spPr>
-      </p:pic>
-      <p:pic>
-        <p:nvPicPr>
-          <p:cNvPr id="56" name="図 55" descr="光 が含まれている画像&#10;&#10;自動的に生成された説明">
-            <a:extLst>
-              <a:ext uri="{FF2B5EF4-FFF2-40B4-BE49-F238E27FC236}">
-                <a16:creationId xmlns:a16="http://schemas.microsoft.com/office/drawing/2014/main" id="{A1AD48E8-6B4C-6D72-E9E8-E74DEE48CBE2}"/>
-              </a:ext>
-            </a:extLst>
-          </p:cNvPr>
-          <p:cNvPicPr>
-            <a:picLocks noChangeAspect="1"/>
-          </p:cNvPicPr>
-          <p:nvPr/>
-        </p:nvPicPr>
-        <p:blipFill>
-          <a:blip r:embed="rId4"/>
-          <a:stretch>
-            <a:fillRect/>
-          </a:stretch>
-        </p:blipFill>
-        <p:spPr>
-          <a:xfrm>
-            <a:off x="10290564" y="3807399"/>
-            <a:ext cx="878018" cy="1518069"/>
-          </a:xfrm>
-          <a:prstGeom prst="rect">
-            <a:avLst/>
-          </a:prstGeom>
-        </p:spPr>
-      </p:pic>
+          <a:noFill/>
+        </p:spPr>
+        <p:txBody>
+          <a:bodyPr wrap="none" rtlCol="0">
+            <a:spAutoFit/>
+          </a:bodyPr>
+          <a:lstStyle/>
+          <a:p>
+            <a:r>
+              <a:rPr kumimoji="1" lang="en-US" altLang="ja-JP" dirty="0"/>
+              <a:t>2</a:t>
+            </a:r>
+            <a:r>
+              <a:rPr kumimoji="1" lang="ja-JP" altLang="en-US"/>
+              <a:t>進数で振動をオン・オフ</a:t>
+            </a:r>
+          </a:p>
+        </p:txBody>
+      </p:sp>
     </p:spTree>
     <p:extLst>
       <p:ext uri="{BB962C8B-B14F-4D97-AF65-F5344CB8AC3E}">
-        <p14:creationId xmlns:p14="http://schemas.microsoft.com/office/powerpoint/2010/main" val="4006340411"/>
+        <p14:creationId xmlns:p14="http://schemas.microsoft.com/office/powerpoint/2010/main" val="400402620"/>
       </p:ext>
     </p:extLst>
   </p:cSld>
